--- a/decks/geog-weather-hazards/geog-weather-hazards_ch4_typhoon-haiyan.pptx
+++ b/decks/geog-weather-hazards/geog-weather-hazards_ch4_typhoon-haiyan.pptx
@@ -126,30 +126,30 @@
   <p:extLst>
     <p:ext uri="{521415D9-36F7-43E2-AB2F-B90AF26B5E84}">
       <p14:sectionLst xmlns:p14="http://schemas.microsoft.com/office/powerpoint/2010/main">
-        <p14:section name="Opening" id="{e6964aa2-da4c-7741-c10c-7114ad5286ca}">
+        <p14:section name="Opening" id="{2f95b789-3283-4984-28e4-1360d307ca87}">
           <p14:sldIdLst>
             <p14:sldId id="256"/>
           </p14:sldIdLst>
         </p14:section>
-        <p14:section name="Gate" id="{93c8e886-c278-519c-d372-4faa6086cc61}">
+        <p14:section name="Gate" id="{3f38aa01-1071-c033-5be5-a36938a4ce06}">
           <p14:sldIdLst>
             <p14:sldId id="257"/>
             <p14:sldId id="258"/>
           </p14:sldIdLst>
         </p14:section>
-        <p14:section name="Pre-teach" id="{66b051fa-a1f4-f8d6-8393-3fba49ee866e}">
+        <p14:section name="Pre-teach" id="{c6bd744c-8cac-3fb4-cc4a-9fe4ab271beb}">
           <p14:sldIdLst>
             <p14:sldId id="259"/>
             <p14:sldId id="260"/>
           </p14:sldIdLst>
         </p14:section>
-        <p14:section name="Read-along" id="{21677f2a-f2e0-4b67-99c7-015e60bc5bfa}">
+        <p14:section name="Read-along" id="{32cbc1e5-c35a-cbf3-38e6-d1a669739662}">
           <p14:sldIdLst>
             <p14:sldId id="261"/>
             <p14:sldId id="262"/>
           </p14:sldIdLst>
         </p14:section>
-        <p14:section name="Teach" id="{4a022e79-8e93-8931-3e22-7e85c9fb4492}">
+        <p14:section name="Teach" id="{067b4bb5-87c2-1e4e-2add-7850f864b1b4}">
           <p14:sldIdLst>
             <p14:sldId id="263"/>
             <p14:sldId id="264"/>
@@ -158,7 +158,7 @@
             <p14:sldId id="267"/>
           </p14:sldIdLst>
         </p14:section>
-        <p14:section name="Routes" id="{2fc7d03e-9432-f931-fb69-a1de5b3d6164}">
+        <p14:section name="Routes" id="{bdc0d1b6-9fea-6f44-0a68-6d491f97f6cf}">
           <p14:sldIdLst>
             <p14:sldId id="268"/>
             <p14:sldId id="269"/>
@@ -166,12 +166,12 @@
             <p14:sldId id="271"/>
           </p14:sldIdLst>
         </p14:section>
-        <p14:section name="Close" id="{50a24349-cf3f-299b-0414-f821e2fc1795}">
+        <p14:section name="Close" id="{af301b00-654b-242d-645d-7f386e164eb6}">
           <p14:sldIdLst>
             <p14:sldId id="272"/>
           </p14:sldIdLst>
         </p14:section>
-        <p14:section name="Answers" id="{a522fed7-c078-ba15-7262-878c4bcc0714}">
+        <p14:section name="Answers" id="{9308b37c-cc5b-1dd7-dbdd-55d73460e87f}">
           <p14:sldIdLst>
             <p14:sldId id="273"/>
             <p14:sldId id="274"/>
@@ -767,7 +767,7 @@
             <a:r>
               <a:rPr lang="en-US" dirty="0"/>
               <a:t>Teach — Effects, responses and the choropleth map. Say it in your own words, then check understanding with a quick question: ask a pupil from the pre-teach group first, since they met these words and ideas before the lesson. Pupils try to recall before you re-explain.
-The primary effects you have from the deck are the ones the storm did itself: winds above 275 kilometres per hour wrecked buildings across Leyte, and the five-metre storm surge swept through Tacloban, leaving 220 000 people homeless. The deck sends you to the textbook for the full list of effects and for the responses; in class you chose the two most impactful primary effects, the two most impactful secondary effects, the two most important immediate responses and the two most important long-term responses. Use your own notes for those: the point of the exercise was to judge which mattered most, and to be able to explain why.
+The primary effects you have from the deck are the ones the storm did itself: winds above 275 kilometres per hour wrecked buildings across Leyte, and the five-metre storm surge swept through Tacloban, leaving 220 000 people homeless. The deck sends you to the textbook for the full list of effects and for the responses; in class you picked out the two primary effects and the two secondary effects that mattered most, then the two responses in the first days and the two over the years that mattered most. Use your own notes for those: the point of the exercise was to judge which mattered most, and to be able to explain why.
 Responses follow the pattern from chapter 3. Immediate responses deal with the primary effects in the first days: search and rescue, shelter, medical supplies, food and clean water. Long-term responses deal with the secondary effects over months and years: rebuilding homes, roads and schools, restoring power and water, and helping farmers and fishermen earn a living again. In a LIC, much of both kinds of help comes from other countries and from aid agencies.
 A choropleth map shows how many people were affected in each region of the Philippines. You chose a scale of colours from lightest (fewest people) to darkest (most), leaving No data areas white, and shaded each region. Eastern Visayas and Central Visayas, the regions the storm crossed, had more than 500 001 people affected and took the darkest shade; Western Visayas had 100 001 to 500 000; Northern Mindanao 10 001 to 100 000; and regions far from the track, such as Central Luzon, under 1000. The map's strength is that the pattern jumps out: the darkest band follows the storm track. Its limits are that a region is coloured as if everyone in it was affected equally, that the ranges hide big differences within a band, and that one region had no data at all.
 Tip: On a choropleth map the colour shows an amount for the whole area. Describe the pattern (where the darkest areas are), then suggest reasons (the storm track, population, low-lying coasts).</a:t>
